--- a/media/exports/reports/2026-02/calls.pptx
+++ b/media/exports/reports/2026-02/calls.pptx
@@ -235,25 +235,25 @@
                 <c:formatCode>#,##0;[Red](#,##0)</c:formatCode>
                 <c:ptCount val="7"/>
                 <c:pt idx="0">
-                  <c:v>61</c:v>
+                  <c:v>65</c:v>
                 </c:pt>
                 <c:pt idx="1">
-                  <c:v>118</c:v>
+                  <c:v>122</c:v>
                 </c:pt>
                 <c:pt idx="2">
-                  <c:v>135</c:v>
+                  <c:v>122</c:v>
                 </c:pt>
                 <c:pt idx="3">
-                  <c:v>120</c:v>
+                  <c:v>91</c:v>
                 </c:pt>
                 <c:pt idx="4">
-                  <c:v>105</c:v>
+                  <c:v>91</c:v>
                 </c:pt>
                 <c:pt idx="5">
-                  <c:v>87</c:v>
+                  <c:v>79</c:v>
                 </c:pt>
                 <c:pt idx="6">
-                  <c:v>137</c:v>
+                  <c:v>108</c:v>
                 </c:pt>
               </c:numCache>
             </c:numRef>
@@ -317,7 +317,7 @@
       <c:valAx>
         <c:axId val="-2113994440"/>
         <c:scaling>
-          <c:max val="157.54999999999998"/>
+          <c:max val="140.29999999999998"/>
           <c:min val="0.0"/>
         </c:scaling>
         <c:delete/>
@@ -462,55 +462,55 @@
                 <c:formatCode>#,##0;[Red](#,##0)</c:formatCode>
                 <c:ptCount val="17"/>
                 <c:pt idx="0">
-                  <c:v>659</c:v>
+                  <c:v>685</c:v>
                 </c:pt>
                 <c:pt idx="1">
-                  <c:v>655</c:v>
+                  <c:v>633</c:v>
                 </c:pt>
                 <c:pt idx="2">
+                  <c:v>684</c:v>
+                </c:pt>
+                <c:pt idx="3">
+                  <c:v>690</c:v>
+                </c:pt>
+                <c:pt idx="4">
+                  <c:v>664</c:v>
+                </c:pt>
+                <c:pt idx="5">
                   <c:v>685</c:v>
                 </c:pt>
-                <c:pt idx="3">
-                  <c:v>714</c:v>
-                </c:pt>
-                <c:pt idx="4">
-                  <c:v>683</c:v>
-                </c:pt>
-                <c:pt idx="5">
-                  <c:v>725</c:v>
-                </c:pt>
                 <c:pt idx="6">
-                  <c:v>620</c:v>
+                  <c:v>629</c:v>
                 </c:pt>
                 <c:pt idx="7">
-                  <c:v>754</c:v>
+                  <c:v>724</c:v>
                 </c:pt>
                 <c:pt idx="8">
-                  <c:v>783</c:v>
+                  <c:v>820</c:v>
                 </c:pt>
                 <c:pt idx="9">
-                  <c:v>871</c:v>
+                  <c:v>909</c:v>
                 </c:pt>
                 <c:pt idx="10">
-                  <c:v>852</c:v>
+                  <c:v>826</c:v>
                 </c:pt>
                 <c:pt idx="11">
-                  <c:v>781</c:v>
+                  <c:v>756</c:v>
                 </c:pt>
                 <c:pt idx="12">
-                  <c:v>792</c:v>
+                  <c:v>770</c:v>
                 </c:pt>
                 <c:pt idx="13">
-                  <c:v>675</c:v>
+                  <c:v>746</c:v>
                 </c:pt>
                 <c:pt idx="14">
-                  <c:v>725</c:v>
+                  <c:v>776</c:v>
                 </c:pt>
                 <c:pt idx="15">
-                  <c:v>756</c:v>
+                  <c:v>726</c:v>
                 </c:pt>
                 <c:pt idx="16">
-                  <c:v>763</c:v>
+                  <c:v>678</c:v>
                 </c:pt>
               </c:numCache>
             </c:numRef>
@@ -1084,7 +1084,7 @@
           <a:lstStyle/>
           <a:p>
             <a:r>
-              <a:t>When do calls for help come in, and are we there to answer?. Calls for help, February: 763; Answered while staffed, February: 80.3%; Calls outside staffed hours, February: 48.9%; Median wait when answered, February: 81 sec. 763 calls for help came in during February. While the line was staffed, 80.3% were answered (target 90.0%); 48.9% of all calls came outside staffed hours and went to voicemail. The busiest time was before 8:30am (137 calls). 118 calls came between 5 and 8pm, when no-one is on the line. 77 callers hung up waiting while the line was staffed.</a:t>
+              <a:t>When do calls for help come in, and are we there to answer?. Calls for help, February: 678; Answered while staffed, February: 80.6%; Calls outside staffed hours, February: 49.7%; Median wait when answered, February: 80 sec. 678 calls for help came in during February. While the line was staffed, 80.6% were answered (target 90.0%); 49.7% of all calls came outside staffed hours and went to voicemail. The busiest time was 2 to 5pm (122 calls). 122 calls came between 5 and 8pm, when no-one is on the line. 66 callers hung up waiting while the line was staffed.</a:t>
             </a:r>
           </a:p>
         </p:txBody>
@@ -4569,7 +4569,7 @@
                 </a:solidFill>
                 <a:latin typeface="Roboto"/>
               </a:rPr>
-              <a:t>Data retrieved 2pm, Tue 6 Oct 2026 · Generated 8 Oct 2026, 6:42pm · Sample data · Made with Python (python-pptx)</a:t>
+              <a:t>Data retrieved 2pm, Tue 6 Oct 2026 · Generated 8 Oct 2026, 11:41pm · Sample data · Made with Python (python-pptx)</a:t>
             </a:r>
           </a:p>
         </p:txBody>
@@ -4915,7 +4915,7 @@
                 </a:solidFill>
                 <a:latin typeface="Roboto"/>
               </a:rPr>
-              <a:t>763</a:t>
+              <a:t>678</a:t>
             </a:r>
           </a:p>
         </p:txBody>
@@ -4954,7 +4954,7 @@
                 </a:solidFill>
                 <a:latin typeface="Roboto"/>
               </a:rPr>
-              <a:t>January 756</a:t>
+              <a:t>January 726</a:t>
             </a:r>
           </a:p>
         </p:txBody>
@@ -5081,7 +5081,7 @@
                 </a:solidFill>
                 <a:latin typeface="Roboto"/>
               </a:rPr>
-              <a:t>80.3%</a:t>
+              <a:t>80.6%</a:t>
             </a:r>
           </a:p>
         </p:txBody>
@@ -5247,7 +5247,7 @@
                 </a:solidFill>
                 <a:latin typeface="Roboto"/>
               </a:rPr>
-              <a:t>48.9%</a:t>
+              <a:t>49.7%</a:t>
             </a:r>
           </a:p>
         </p:txBody>
@@ -5286,7 +5286,7 @@
                 </a:solidFill>
                 <a:latin typeface="Roboto"/>
               </a:rPr>
-              <a:t>373 calls to voicemail</a:t>
+              <a:t>337 calls to voicemail</a:t>
             </a:r>
           </a:p>
         </p:txBody>
@@ -5413,7 +5413,7 @@
                 </a:solidFill>
                 <a:latin typeface="Roboto"/>
               </a:rPr>
-              <a:t>81 sec</a:t>
+              <a:t>80 sec</a:t>
             </a:r>
           </a:p>
         </p:txBody>
@@ -5452,7 +5452,7 @@
                 </a:solidFill>
                 <a:latin typeface="Roboto"/>
               </a:rPr>
-              <a:t>313 answered calls</a:t>
+              <a:t>275 answered calls</a:t>
             </a:r>
           </a:p>
         </p:txBody>
@@ -5597,7 +5597,7 @@
                 </a:solidFill>
                 <a:latin typeface="Roboto"/>
               </a:rPr>
-              <a:t>763 calls for help came in during February. While the line was staffed, 80.3% were answered (target 90.0%); 48.9% of all calls came outside staffed hours and went to voicemail. The busiest time was before 8:30am (137 calls).</a:t>
+              <a:t>678 calls for help came in during February. While the line was staffed, 80.6% were answered (target 90.0%); 49.7% of all calls came outside staffed hours and went to voicemail. The busiest time was 2 to 5pm (122 calls).</a:t>
             </a:r>
           </a:p>
         </p:txBody>
@@ -5724,7 +5724,7 @@
                 </a:solidFill>
                 <a:latin typeface="Roboto"/>
               </a:rPr>
-              <a:t>118 calls came between 5 and 8pm, when no-one is on the line. 77 callers hung up waiting while the line was staffed.</a:t>
+              <a:t>122 calls came between 5 and 8pm, when no-one is on the line. 66 callers hung up waiting while the line was staffed.</a:t>
             </a:r>
           </a:p>
         </p:txBody>
@@ -5802,7 +5802,7 @@
                 </a:solidFill>
                 <a:latin typeface="Roboto"/>
               </a:rPr>
-              <a:t>Data retrieved 2pm, Tue 6 Oct 2026 · Generated 8 Oct 2026, 6:42pm · Sample data · Made with Python (python-pptx)</a:t>
+              <a:t>Data retrieved 2pm, Tue 6 Oct 2026 · Generated 8 Oct 2026, 11:41pm · Sample data · Made with Python (python-pptx)</a:t>
             </a:r>
           </a:p>
         </p:txBody>
@@ -6117,7 +6117,7 @@
                 </a:solidFill>
                 <a:latin typeface="Roboto"/>
               </a:rPr>
-              <a:t>Data retrieved 2pm, Tue 6 Oct 2026 · Generated 8 Oct 2026, 6:42pm · Sample data · Made with Python (python-pptx)</a:t>
+              <a:t>Data retrieved 2pm, Tue 6 Oct 2026 · Generated 8 Oct 2026, 11:41pm · Sample data · Made with Python (python-pptx)</a:t>
             </a:r>
           </a:p>
         </p:txBody>

--- a/media/exports/reports/2026-02/calls.pptx
+++ b/media/exports/reports/2026-02/calls.pptx
@@ -1014,7 +1014,7 @@
           <a:lstStyle/>
           <a:p>
             <a:r>
-              <a:t>When do calls for help come in, and are we there to answer?. Sample Community Services Ltd. Period: February 2026. Every call to the help line: when it came in, whether someone answered, and how long the caller waited. The line is staffed 8:30am to 5pm on working days.</a:t>
+              <a:t>When do calls for help come in, and are we there to answer?. Sample Community Services Ltd. Period: February 2026. In short: 678 calls in February: 80.6% answered while staffed (target 90.0%); 49.7% came outside staffed hours. Every call to the help line: when it came in, whether someone answered, and how long the caller waited. The line is staffed 8:30am to 5pm on working days.</a:t>
             </a:r>
           </a:p>
         </p:txBody>
@@ -4379,7 +4379,7 @@
         <p:spPr>
           <a:xfrm>
             <a:off x="457200" y="3703320"/>
-            <a:ext cx="11277295" cy="535940"/>
+            <a:ext cx="11277295" cy="758190"/>
           </a:xfrm>
           <a:prstGeom prst="rect">
             <a:avLst/>
@@ -4404,7 +4404,7 @@
                 </a:solidFill>
                 <a:latin typeface="Roboto"/>
               </a:rPr>
-              <a:t>Period: February 2026. Every call to the help line: when it came in, whether someone answered, and how long the caller waited. The line is staffed 8:30am to 5pm on working days.</a:t>
+              <a:t>Period: February 2026. In short: 678 calls in February: 80.6% answered while staffed (target 90.0%); 49.7% came outside staffed hours. Every call to the help line: when it came in, whether someone answered, and how long the caller waited. The line is staffed 8:30am to 5pm on working days.</a:t>
             </a:r>
           </a:p>
         </p:txBody>
@@ -4417,7 +4417,7 @@
         </p:nvSpPr>
         <p:spPr>
           <a:xfrm>
-            <a:off x="457200" y="4330700"/>
+            <a:off x="457200" y="4552950"/>
             <a:ext cx="11277295" cy="1097280"/>
           </a:xfrm>
           <a:prstGeom prst="rect">
@@ -4569,7 +4569,7 @@
                 </a:solidFill>
                 <a:latin typeface="Roboto"/>
               </a:rPr>
-              <a:t>Data retrieved 2pm, Tue 6 Oct 2026 · Generated 8 Oct 2026, 11:41pm · Sample data · Made with Python (python-pptx)</a:t>
+              <a:t>Data retrieved 2pm, Tue 6 Oct 2026 · Generated 10 Oct 2026, 9:55pm · Sample data · Made with Python (python-pptx)</a:t>
             </a:r>
           </a:p>
         </p:txBody>
@@ -5802,7 +5802,7 @@
                 </a:solidFill>
                 <a:latin typeface="Roboto"/>
               </a:rPr>
-              <a:t>Data retrieved 2pm, Tue 6 Oct 2026 · Generated 8 Oct 2026, 11:41pm · Sample data · Made with Python (python-pptx)</a:t>
+              <a:t>Data retrieved 2pm, Tue 6 Oct 2026 · Generated 10 Oct 2026, 9:55pm · Sample data · Made with Python (python-pptx)</a:t>
             </a:r>
           </a:p>
         </p:txBody>
@@ -6117,7 +6117,7 @@
                 </a:solidFill>
                 <a:latin typeface="Roboto"/>
               </a:rPr>
-              <a:t>Data retrieved 2pm, Tue 6 Oct 2026 · Generated 8 Oct 2026, 11:41pm · Sample data · Made with Python (python-pptx)</a:t>
+              <a:t>Data retrieved 2pm, Tue 6 Oct 2026 · Generated 10 Oct 2026, 9:55pm · Sample data · Made with Python (python-pptx)</a:t>
             </a:r>
           </a:p>
         </p:txBody>
